--- a/downloads/slides/Lesson3_Slides.pptx
+++ b/downloads/slides/Lesson3_Slides.pptx
@@ -1272,7 +1272,7 @@
           <a:p>
             <a:r>
               <a:rPr lang="en-US" dirty="0"/>
-              <a:t>Step 3 · 6:18–6:30 · Listening (L3_listening.mp3, about 1:35). Before you listen: "What do you think Kim likes?"</a:t>
+              <a:t>Step 3 · 6:18–6:30 · Listening (L3_listening.mp3, about 1:05). Before you listen: "What do you think Kim likes?"</a:t>
             </a:r>
           </a:p>
           <a:p>
